--- a/dist/초5/사회·역사/권리와생활/초5_사회·역사_권리와생활_02_법과규칙.pptx
+++ b/dist/초5/사회·역사/권리와생활/초5_사회·역사_권리와생활_02_법과규칙.pptx
@@ -120,20 +120,20 @@
   <p:extLst>
     <p:ext uri="{521415D9-36F7-43E2-AB2F-B90AF26B5E84}">
       <p14:sectionLst xmlns:p14="http://schemas.microsoft.com/office/powerpoint/2010/main">
-        <p14:section name="도입" id="{fcfcefec-403f-f42d-15b7-35525056d8d0}">
+        <p14:section name="도입" id="{c24ebe91-9a65-3d79-38f7-7419e043d4a3}">
           <p14:sldIdLst>
             <p14:sldId id="256"/>
             <p14:sldId id="257"/>
           </p14:sldIdLst>
         </p14:section>
-        <p14:section name="개념" id="{da3b148b-9202-5370-415f-b709a936f801}">
+        <p14:section name="개념" id="{d2d3b3a7-ee9b-eebe-a7a9-6424a7eb9a29}">
           <p14:sldIdLst>
             <p14:sldId id="258"/>
             <p14:sldId id="261"/>
             <p14:sldId id="262"/>
           </p14:sldIdLst>
         </p14:section>
-        <p14:section name="연습" id="{f4f7724a-ace9-3a8d-9787-8b84765c5bb2}">
+        <p14:section name="연습" id="{9815bd0d-73c2-a818-61e1-04e55926d3e1}">
           <p14:sldIdLst>
             <p14:sldId id="259"/>
             <p14:sldId id="260"/>
@@ -141,25 +141,25 @@
             <p14:sldId id="264"/>
           </p14:sldIdLst>
         </p14:section>
-        <p14:section name="개념" id="{3c96030e-d800-f673-53d8-a9e5b7924ee9}">
+        <p14:section name="개념" id="{1938c4f8-9cb2-7d85-360e-55dfc1a9d0aa}">
           <p14:sldIdLst/>
         </p14:section>
-        <p14:section name="연습" id="{fbea69a3-9b0c-5873-79ae-b589f2869ed1}">
+        <p14:section name="연습" id="{b78d3d74-66ff-b9ca-e95b-ea6e0295b1b5}">
           <p14:sldIdLst/>
         </p14:section>
-        <p14:section name="확인" id="{01e9abbf-8ee2-cdae-fded-b7c44d66c9f4}">
+        <p14:section name="확인" id="{30c3093a-0b11-a954-d8a8-55b019b569e3}">
           <p14:sldIdLst>
             <p14:sldId id="265"/>
             <p14:sldId id="266"/>
             <p14:sldId id="267"/>
           </p14:sldIdLst>
         </p14:section>
-        <p14:section name="정리" id="{e51e988b-4740-98de-e3ee-e5903827b07e}">
+        <p14:section name="정리" id="{4ecf702e-f3b4-9fc1-2791-9e1dc2f56cba}">
           <p14:sldIdLst>
             <p14:sldId id="268"/>
           </p14:sldIdLst>
         </p14:section>
-        <p14:section name="보충" id="{f70315c6-543d-2c9a-53ee-009e9415a1d7}">
+        <p14:section name="보충" id="{8b78774d-4932-471b-6059-6bf7ab769731}">
           <p14:sldIdLst>
             <p14:sldId id="269"/>
           </p14:sldIdLst>
